--- a/chapter_04/figures/ecpoint_mapping_function_decision_tree.pptx
+++ b/chapter_04/figures/ecpoint_mapping_function_decision_tree.pptx
@@ -125,12 +125,12 @@
   <pc:docChgLst>
     <pc:chgData name="Fatima Pillosu" userId="a6295d4dc9e22643" providerId="LiveId" clId="{87453732-75AC-4426-B5D3-B7C69C2D4F54}"/>
     <pc:docChg chg="modSld">
-      <pc:chgData name="Fatima Pillosu" userId="a6295d4dc9e22643" providerId="LiveId" clId="{87453732-75AC-4426-B5D3-B7C69C2D4F54}" dt="2026-01-19T20:48:28.911" v="15" actId="255"/>
+      <pc:chgData name="Fatima Pillosu" userId="a6295d4dc9e22643" providerId="LiveId" clId="{87453732-75AC-4426-B5D3-B7C69C2D4F54}" dt="2026-01-19T21:06:50.888" v="126" actId="1036"/>
       <pc:docMkLst>
         <pc:docMk/>
       </pc:docMkLst>
       <pc:sldChg chg="modSp mod">
-        <pc:chgData name="Fatima Pillosu" userId="a6295d4dc9e22643" providerId="LiveId" clId="{87453732-75AC-4426-B5D3-B7C69C2D4F54}" dt="2026-01-19T20:48:28.911" v="15" actId="255"/>
+        <pc:chgData name="Fatima Pillosu" userId="a6295d4dc9e22643" providerId="LiveId" clId="{87453732-75AC-4426-B5D3-B7C69C2D4F54}" dt="2026-01-19T21:06:50.888" v="126" actId="1036"/>
         <pc:sldMkLst>
           <pc:docMk/>
           <pc:sldMk cId="118045167" sldId="256"/>
@@ -344,11 +344,19 @@
           </ac:spMkLst>
         </pc:spChg>
         <pc:spChg chg="mod">
-          <ac:chgData name="Fatima Pillosu" userId="a6295d4dc9e22643" providerId="LiveId" clId="{87453732-75AC-4426-B5D3-B7C69C2D4F54}" dt="2026-01-19T20:45:40.201" v="2" actId="2711"/>
+          <ac:chgData name="Fatima Pillosu" userId="a6295d4dc9e22643" providerId="LiveId" clId="{87453732-75AC-4426-B5D3-B7C69C2D4F54}" dt="2026-01-19T21:06:42.707" v="117" actId="20577"/>
           <ac:spMkLst>
             <pc:docMk/>
             <pc:sldMk cId="118045167" sldId="256"/>
             <ac:spMk id="737" creationId="{AB3851F4-A68B-CC96-F21E-942109A6FA75}"/>
+          </ac:spMkLst>
+        </pc:spChg>
+        <pc:spChg chg="mod">
+          <ac:chgData name="Fatima Pillosu" userId="a6295d4dc9e22643" providerId="LiveId" clId="{87453732-75AC-4426-B5D3-B7C69C2D4F54}" dt="2026-01-19T21:06:50.888" v="126" actId="1036"/>
+          <ac:spMkLst>
+            <pc:docMk/>
+            <pc:sldMk cId="118045167" sldId="256"/>
+            <ac:spMk id="738" creationId="{28B884CB-BF57-8119-58D1-AA624199839B}"/>
           </ac:spMkLst>
         </pc:spChg>
         <pc:spChg chg="mod">
@@ -12594,8 +12602,8 @@
           </a:fontRef>
         </p:style>
       </p:cxnSp>
-      <mc:AlternateContent xmlns:mc="http://schemas.openxmlformats.org/markup-compatibility/2006">
-        <mc:Choice xmlns:a14="http://schemas.microsoft.com/office/drawing/2010/main" Requires="a14">
+      <mc:AlternateContent xmlns:mc="http://schemas.openxmlformats.org/markup-compatibility/2006" xmlns:a14="http://schemas.microsoft.com/office/drawing/2010/main">
+        <mc:Choice Requires="a14">
           <p:sp>
             <p:nvSpPr>
               <p:cNvPr id="735" name="TextBox 734">
@@ -12727,24 +12735,7 @@
                             <a:ea typeface="Calibri" panose="020F0502020204030204" pitchFamily="34" charset="0"/>
                             <a:cs typeface="Calibri" panose="020F0502020204030204" pitchFamily="34" charset="0"/>
                           </a:rPr>
-                          <m:t>FgridCA</m:t>
-                        </m:r>
-                        <m:r>
-                          <m:rPr>
-                            <m:nor/>
-                          </m:rPr>
-                          <a:rPr lang="en-US" sz="1000" b="1" baseline="-25000" dirty="0">
-                            <a:solidFill>
-                              <a:schemeClr val="tx1">
-                                <a:lumMod val="65000"/>
-                                <a:lumOff val="35000"/>
-                              </a:schemeClr>
-                            </a:solidFill>
-                            <a:latin typeface="Calibri" panose="020F0502020204030204" pitchFamily="34" charset="0"/>
-                            <a:ea typeface="Calibri" panose="020F0502020204030204" pitchFamily="34" charset="0"/>
-                            <a:cs typeface="Calibri" panose="020F0502020204030204" pitchFamily="34" charset="0"/>
-                          </a:rPr>
-                          <m:t>L</m:t>
+                          <m:t>FgridCAL</m:t>
                         </m:r>
                       </m:num>
                       <m:den>
@@ -12801,7 +12792,7 @@
             </p:txBody>
           </p:sp>
         </mc:Choice>
-        <mc:Fallback>
+        <mc:Fallback xmlns="">
           <p:sp>
             <p:nvSpPr>
               <p:cNvPr id="735" name="TextBox 734">
@@ -13131,7 +13122,7 @@
                 <a:ea typeface="Calibri" panose="020F0502020204030204" pitchFamily="34" charset="0"/>
                 <a:cs typeface="Calibri" panose="020F0502020204030204" pitchFamily="34" charset="0"/>
               </a:rPr>
-              <a:t>Univariate and multivariate approach for ecPoint</a:t>
+              <a:t>Graphical representation of the ecPoint post-processing technique</a:t>
             </a:r>
           </a:p>
           <a:p>
@@ -13152,7 +13143,7 @@
                 <a:ea typeface="Calibri Light" panose="020F0302020204030204" pitchFamily="34" charset="0"/>
                 <a:cs typeface="Calibri Light" panose="020F0302020204030204" pitchFamily="34" charset="0"/>
               </a:rPr>
-              <a:t>Graphical representation</a:t>
+              <a:t>Mapping function and decision tree</a:t>
             </a:r>
             <a:endParaRPr lang="en-GB" sz="1000" dirty="0">
               <a:solidFill>
@@ -13182,7 +13173,7 @@
         </p:nvSpPr>
         <p:spPr>
           <a:xfrm>
-            <a:off x="-61499" y="362464"/>
+            <a:off x="-61499" y="466968"/>
             <a:ext cx="7148095" cy="215444"/>
           </a:xfrm>
           <a:prstGeom prst="rect">
